--- a/evidence/2026-10-02/run-fair/raw/libreoffice/feature-matrix/measured-1.pptx
+++ b/evidence/2026-10-02/run-fair/raw/libreoffice/feature-matrix/measured-1.pptx
@@ -424,7 +424,7 @@
             <a:pPr indent="0" algn="r">
               <a:buNone/>
             </a:pPr>
-            <a:fld id="{4868A08B-6068-4ABC-AAF3-DD4D5D864A23}" type="slidenum">
+            <a:fld id="{2849EA3A-002E-4533-9D8C-F66C3ABB9C9E}" type="slidenum">
               <a:rPr lang="en-US" sz="1400" b="0" u="none" strike="noStrike">
                 <a:solidFill>
                   <a:srgbClr val="000000"/>
@@ -598,7 +598,7 @@
               </a:lnSpc>
               <a:buNone/>
             </a:pPr>
-            <a:fld id="{01A606B9-B964-4DF3-9617-347C66D20441}" type="slidenum">
+            <a:fld id="{37ECF6BF-0A14-4C11-9B8E-C0455F1589E5}" type="slidenum">
               <a:rPr lang="en-US" sz="1200" b="0" u="none" strike="noStrike">
                 <a:solidFill>
                   <a:srgbClr val="000000"/>
@@ -915,7 +915,7 @@
               </a:lnSpc>
               <a:buNone/>
             </a:pPr>
-            <a:fld id="{001ED48A-D59D-4B1D-BFB7-58C9372E5523}" type="slidenum">
+            <a:fld id="{1ECF8733-9D9B-42D5-B94B-F3410F2E60BF}" type="slidenum">
               <a:rPr lang="en-US" sz="1200" b="0" u="none" strike="noStrike">
                 <a:solidFill>
                   <a:schemeClr val="dk1">
@@ -1627,7 +1627,7 @@
               </a:lnSpc>
               <a:buNone/>
             </a:pPr>
-            <a:fld id="{ADB44A1F-833A-4747-A2E0-88E1D19140FD}" type="slidenum">
+            <a:fld id="{E95A93EF-26D3-4981-95E3-7F4F7FF855A1}" type="slidenum">
               <a:rPr lang="en-US" sz="1200" b="0" u="none" strike="noStrike">
                 <a:solidFill>
                   <a:schemeClr val="dk1">
@@ -2086,7 +2086,7 @@
               </a:lnSpc>
               <a:buNone/>
             </a:pPr>
-            <a:fld id="{ADB373BE-2615-4B00-A31D-FB8D968535E3}" type="slidenum">
+            <a:fld id="{2C8AFFA5-320C-45C2-8A53-70C727B21837}" type="slidenum">
               <a:rPr lang="en-US" sz="1200" b="0" u="none" strike="noStrike">
                 <a:solidFill>
                   <a:schemeClr val="dk1">
@@ -2714,7 +2714,7 @@
               </a:lnSpc>
               <a:buNone/>
             </a:pPr>
-            <a:fld id="{0C6DAFFB-F151-42E0-983D-0BD3DBCCEDFA}" type="slidenum">
+            <a:fld id="{B0FFED16-A8A6-4B94-AFAD-6947C7DB8A9C}" type="slidenum">
               <a:rPr lang="en-US" sz="1200" b="0" u="none" strike="noStrike">
                 <a:solidFill>
                   <a:schemeClr val="dk1">
@@ -3342,7 +3342,7 @@
               </a:lnSpc>
               <a:buNone/>
             </a:pPr>
-            <a:fld id="{C9901E76-7D02-41A6-8D6E-3937BF7462D7}" type="slidenum">
+            <a:fld id="{19250ED4-A730-4F08-926A-DA7417B3520A}" type="slidenum">
               <a:rPr lang="en-US" sz="1200" b="0" u="none" strike="noStrike">
                 <a:solidFill>
                   <a:schemeClr val="dk1">
@@ -3970,7 +3970,7 @@
               </a:lnSpc>
               <a:buNone/>
             </a:pPr>
-            <a:fld id="{21121817-EF74-4A2D-8320-3AC95C9D7FC5}" type="slidenum">
+            <a:fld id="{598770B3-D164-41FE-BAB6-3B99941FA275}" type="slidenum">
               <a:rPr lang="en-US" sz="1200" b="0" u="none" strike="noStrike">
                 <a:solidFill>
                   <a:schemeClr val="dk1">
@@ -4382,7 +4382,7 @@
               </a:lnSpc>
               <a:buNone/>
             </a:pPr>
-            <a:fld id="{AA07D6C3-10A6-42CB-80F7-2994DB5AD6BE}" type="slidenum">
+            <a:fld id="{E3B70261-5591-4A72-B43E-53FF41960AAB}" type="slidenum">
               <a:rPr lang="en-US" sz="1200" b="0" u="none" strike="noStrike">
                 <a:solidFill>
                   <a:schemeClr val="dk1">
@@ -5316,7 +5316,7 @@
               </a:lnSpc>
               <a:buNone/>
             </a:pPr>
-            <a:fld id="{C44639AD-D83D-44EC-ADF5-BB4741374BC0}" type="slidenum">
+            <a:fld id="{ABB2D572-17B5-4215-A157-BCA6E25E86A6}" type="slidenum">
               <a:rPr lang="en-US" sz="1200" b="0" u="none" strike="noStrike">
                 <a:solidFill>
                   <a:schemeClr val="dk1">
@@ -6478,7 +6478,7 @@
               </a:lnSpc>
               <a:buNone/>
             </a:pPr>
-            <a:fld id="{300C3827-C9D6-4399-9F61-2361A8EB59BF}" type="slidenum">
+            <a:fld id="{B11FDBD2-F9DE-4425-8919-9C2B4889DFB0}" type="slidenum">
               <a:rPr lang="en-US" sz="1200" b="0" u="none" strike="noStrike">
                 <a:solidFill>
                   <a:schemeClr val="dk1">
@@ -6800,7 +6800,7 @@
               </a:lnSpc>
               <a:buNone/>
             </a:pPr>
-            <a:fld id="{80D39B4A-43E1-4761-AFB4-94D75676F0EA}" type="slidenum">
+            <a:fld id="{13F09753-05DE-4CBB-9AAC-9F4DA9FACAE7}" type="slidenum">
               <a:rPr lang="en-US" sz="1200" b="0" u="none" strike="noStrike">
                 <a:solidFill>
                   <a:schemeClr val="dk1">
@@ -7050,7 +7050,7 @@
               </a:lnSpc>
               <a:buNone/>
             </a:pPr>
-            <a:fld id="{158E04B9-E9AB-459B-B689-8D4894BDE261}" type="slidenum">
+            <a:fld id="{DD875BEB-7506-4251-A366-B54103373FDC}" type="slidenum">
               <a:rPr lang="en-US" sz="1200" b="0" u="none" strike="noStrike">
                 <a:solidFill>
                   <a:schemeClr val="dk1">
